--- a/src/ppt-super/assets/tpl-17-problem-solution/template.pptx
+++ b/src/ppt-super/assets/tpl-17-problem-solution/template.pptx
@@ -3136,7 +3136,14 @@
           <a:bodyPr rtlCol="0" anchor="ctr"/>
           <a:lstStyle/>
           <a:p>
-            <a:pPr algn="ctr"/>
+            <a:pPr algn="ctr">
+              <a:spcBef>
+                <a:spcPts val="0"/>
+              </a:spcBef>
+              <a:spcAft>
+                <a:spcPts val="0"/>
+              </a:spcAft>
+            </a:pPr>
           </a:p>
         </p:txBody>
       </p:sp>
@@ -3166,14 +3173,21 @@
               <a:lnSpc>
                 <a:spcPct val="112000"/>
               </a:lnSpc>
+              <a:spcBef>
+                <a:spcPts val="0"/>
+              </a:spcBef>
+              <a:spcAft>
+                <a:spcPts val="0"/>
+              </a:spcAft>
             </a:pPr>
             <a:r>
-              <a:rPr sz="1400" b="1" i="0">
+              <a:rPr sz="1400" b="1" i="0" lang="zh-CN" altLang="zh-CN">
                 <a:solidFill>
                   <a:srgbClr val="FFFFFF"/>
                 </a:solidFill>
                 <a:latin typeface="Microsoft YaHei"/>
                 <a:ea typeface="Microsoft YaHei"/>
+                <a:cs typeface="Microsoft YaHei"/>
               </a:rPr>
               <a:t>数据治理</a:t>
             </a:r>
@@ -3206,14 +3220,21 @@
               <a:lnSpc>
                 <a:spcPct val="112000"/>
               </a:lnSpc>
+              <a:spcBef>
+                <a:spcPts val="0"/>
+              </a:spcBef>
+              <a:spcAft>
+                <a:spcPts val="0"/>
+              </a:spcAft>
             </a:pPr>
             <a:r>
-              <a:rPr sz="2200" b="1" i="0">
+              <a:rPr sz="2200" b="1" i="0" lang="zh-CN" altLang="zh-CN">
                 <a:solidFill>
                   <a:srgbClr val="B90A0A"/>
                 </a:solidFill>
                 <a:latin typeface="Microsoft YaHei"/>
                 <a:ea typeface="Microsoft YaHei"/>
+                <a:cs typeface="Microsoft YaHei"/>
               </a:rPr>
               <a:t>统一数据底座破解数据孤岛, 跨域取数效率提升 20 倍</a:t>
             </a:r>
@@ -3298,7 +3319,14 @@
           <a:bodyPr rtlCol="0" anchor="ctr"/>
           <a:lstStyle/>
           <a:p>
-            <a:pPr algn="ctr"/>
+            <a:pPr algn="ctr">
+              <a:spcBef>
+                <a:spcPts val="0"/>
+              </a:spcBef>
+              <a:spcAft>
+                <a:spcPts val="0"/>
+              </a:spcAft>
+            </a:pPr>
           </a:p>
         </p:txBody>
       </p:sp>
@@ -3342,7 +3370,14 @@
           <a:bodyPr rtlCol="0" anchor="ctr"/>
           <a:lstStyle/>
           <a:p>
-            <a:pPr algn="ctr"/>
+            <a:pPr algn="ctr">
+              <a:spcBef>
+                <a:spcPts val="0"/>
+              </a:spcBef>
+              <a:spcAft>
+                <a:spcPts val="0"/>
+              </a:spcAft>
+            </a:pPr>
           </a:p>
         </p:txBody>
       </p:sp>
@@ -3388,7 +3423,14 @@
           <a:bodyPr rtlCol="0" anchor="ctr"/>
           <a:lstStyle/>
           <a:p>
-            <a:pPr algn="ctr"/>
+            <a:pPr algn="ctr">
+              <a:spcBef>
+                <a:spcPts val="0"/>
+              </a:spcBef>
+              <a:spcAft>
+                <a:spcPts val="0"/>
+              </a:spcAft>
+            </a:pPr>
           </a:p>
         </p:txBody>
       </p:sp>
@@ -3432,7 +3474,14 @@
           <a:bodyPr rtlCol="0" anchor="ctr"/>
           <a:lstStyle/>
           <a:p>
-            <a:pPr algn="ctr"/>
+            <a:pPr algn="ctr">
+              <a:spcBef>
+                <a:spcPts val="0"/>
+              </a:spcBef>
+              <a:spcAft>
+                <a:spcPts val="0"/>
+              </a:spcAft>
+            </a:pPr>
           </a:p>
         </p:txBody>
       </p:sp>
@@ -3476,7 +3525,14 @@
           <a:bodyPr rtlCol="0" anchor="ctr"/>
           <a:lstStyle/>
           <a:p>
-            <a:pPr algn="ctr"/>
+            <a:pPr algn="ctr">
+              <a:spcBef>
+                <a:spcPts val="0"/>
+              </a:spcBef>
+              <a:spcAft>
+                <a:spcPts val="0"/>
+              </a:spcAft>
+            </a:pPr>
           </a:p>
         </p:txBody>
       </p:sp>
@@ -3506,14 +3562,21 @@
               <a:lnSpc>
                 <a:spcPct val="112000"/>
               </a:lnSpc>
+              <a:spcBef>
+                <a:spcPts val="0"/>
+              </a:spcBef>
+              <a:spcAft>
+                <a:spcPts val="0"/>
+              </a:spcAft>
             </a:pPr>
             <a:r>
-              <a:rPr sz="1500" b="1" i="0">
+              <a:rPr sz="1500" b="1" i="0" lang="zh-CN" altLang="zh-CN">
                 <a:solidFill>
                   <a:srgbClr val="262626"/>
                 </a:solidFill>
                 <a:latin typeface="Microsoft YaHei"/>
                 <a:ea typeface="Microsoft YaHei"/>
+                <a:cs typeface="Microsoft YaHei"/>
               </a:rPr>
               <a:t>痛点</a:t>
             </a:r>
@@ -3546,14 +3609,21 @@
               <a:lnSpc>
                 <a:spcPct val="112000"/>
               </a:lnSpc>
+              <a:spcBef>
+                <a:spcPts val="0"/>
+              </a:spcBef>
+              <a:spcAft>
+                <a:spcPts val="0"/>
+              </a:spcAft>
             </a:pPr>
             <a:r>
-              <a:rPr sz="1000" b="1" i="0">
+              <a:rPr sz="1000" b="1" i="0" lang="zh-CN" altLang="zh-CN">
                 <a:solidFill>
                   <a:srgbClr val="B90A0A"/>
                 </a:solidFill>
                 <a:latin typeface="Microsoft YaHei"/>
                 <a:ea typeface="Microsoft YaHei"/>
+                <a:cs typeface="Microsoft YaHei"/>
               </a:rPr>
               <a:t>As-Is</a:t>
             </a:r>
@@ -3600,7 +3670,14 @@
           <a:bodyPr rtlCol="0" anchor="ctr"/>
           <a:lstStyle/>
           <a:p>
-            <a:pPr algn="ctr"/>
+            <a:pPr algn="ctr">
+              <a:spcBef>
+                <a:spcPts val="0"/>
+              </a:spcBef>
+              <a:spcAft>
+                <a:spcPts val="0"/>
+              </a:spcAft>
+            </a:pPr>
           </a:p>
         </p:txBody>
       </p:sp>
@@ -3644,7 +3721,14 @@
           <a:bodyPr rtlCol="0" anchor="ctr"/>
           <a:lstStyle/>
           <a:p>
-            <a:pPr algn="ctr"/>
+            <a:pPr algn="ctr">
+              <a:spcBef>
+                <a:spcPts val="0"/>
+              </a:spcBef>
+              <a:spcAft>
+                <a:spcPts val="0"/>
+              </a:spcAft>
+            </a:pPr>
           </a:p>
         </p:txBody>
       </p:sp>
@@ -3688,7 +3772,14 @@
           <a:bodyPr rtlCol="0" anchor="ctr"/>
           <a:lstStyle/>
           <a:p>
-            <a:pPr algn="ctr"/>
+            <a:pPr algn="ctr">
+              <a:spcBef>
+                <a:spcPts val="0"/>
+              </a:spcBef>
+              <a:spcAft>
+                <a:spcPts val="0"/>
+              </a:spcAft>
+            </a:pPr>
           </a:p>
         </p:txBody>
       </p:sp>
@@ -3700,8 +3791,8 @@
         </p:nvSpPr>
         <p:spPr>
           <a:xfrm>
-            <a:off x="546100" y="1238250"/>
-            <a:ext cx="2654300" cy="2444750"/>
+            <a:off x="513524" y="1238250"/>
+            <a:ext cx="2719451" cy="2444750"/>
           </a:xfrm>
           <a:prstGeom prst="rect">
             <a:avLst/>
@@ -3718,14 +3809,21 @@
               <a:lnSpc>
                 <a:spcPct val="130000"/>
               </a:lnSpc>
+              <a:spcBef>
+                <a:spcPts val="0"/>
+              </a:spcBef>
+              <a:spcAft>
+                <a:spcPts val="0"/>
+              </a:spcAft>
             </a:pPr>
             <a:r>
-              <a:rPr sz="1200" b="0" i="0">
+              <a:rPr sz="1200" b="0" i="0" lang="zh-CN" altLang="zh-CN">
                 <a:solidFill>
                   <a:srgbClr val="262626"/>
                 </a:solidFill>
                 <a:latin typeface="Microsoft YaHei"/>
                 <a:ea typeface="Microsoft YaHei"/>
+                <a:cs typeface="Microsoft YaHei"/>
               </a:rPr>
               <a:t>当前 37 套业务系统各自建库, 数据孤岛问题突出, 跨域取数平均耗时 5 天, 同一指标在三个部门出现三个数, 口径争议月均 15 起, 跨部门对账消耗大量人力。人工报表每月消耗约 1200 人时且错漏率高达 8%; 数据资产缺乏统一目录, 约 60% 的数据长期沉睡无人知晓; 敏感数据散落在 9 个系统中, 权限管理失控, 外部审计与合规风险持续累积, 统一数据底座建设已刻不容缓。</a:t>
             </a:r>
@@ -3758,14 +3856,21 @@
               <a:lnSpc>
                 <a:spcPct val="112000"/>
               </a:lnSpc>
+              <a:spcBef>
+                <a:spcPts val="0"/>
+              </a:spcBef>
+              <a:spcAft>
+                <a:spcPts val="0"/>
+              </a:spcAft>
             </a:pPr>
             <a:r>
-              <a:rPr sz="1000" b="0" i="0">
+              <a:rPr sz="1000" b="0" i="0" lang="zh-CN" altLang="zh-CN">
                 <a:solidFill>
                   <a:srgbClr val="595959"/>
                 </a:solidFill>
                 <a:latin typeface="Microsoft YaHei"/>
                 <a:ea typeface="Microsoft YaHei"/>
+                <a:cs typeface="Microsoft YaHei"/>
               </a:rPr>
               <a:t>跨域取数平均耗时趋势 (天)</a:t>
             </a:r>
@@ -3848,7 +3953,14 @@
           <a:bodyPr rtlCol="0" anchor="ctr"/>
           <a:lstStyle/>
           <a:p>
-            <a:pPr algn="ctr"/>
+            <a:pPr algn="ctr">
+              <a:spcBef>
+                <a:spcPts val="0"/>
+              </a:spcBef>
+              <a:spcAft>
+                <a:spcPts val="0"/>
+              </a:spcAft>
+            </a:pPr>
           </a:p>
         </p:txBody>
       </p:sp>
@@ -3860,8 +3972,8 @@
         </p:nvSpPr>
         <p:spPr>
           <a:xfrm>
-            <a:off x="737658" y="4782007"/>
-            <a:ext cx="783166" cy="139700"/>
+            <a:off x="737658" y="4761623"/>
+            <a:ext cx="783166" cy="180467"/>
           </a:xfrm>
           <a:prstGeom prst="rect">
             <a:avLst/>
@@ -3878,14 +3990,21 @@
               <a:lnSpc>
                 <a:spcPct val="112000"/>
               </a:lnSpc>
+              <a:spcBef>
+                <a:spcPts val="0"/>
+              </a:spcBef>
+              <a:spcAft>
+                <a:spcPts val="0"/>
+              </a:spcAft>
             </a:pPr>
             <a:r>
-              <a:rPr sz="1000" b="1" i="0">
+              <a:rPr sz="1000" b="1" i="0" lang="zh-CN" altLang="zh-CN">
                 <a:solidFill>
                   <a:srgbClr val="262626"/>
                 </a:solidFill>
                 <a:latin typeface="Microsoft YaHei"/>
                 <a:ea typeface="Microsoft YaHei"/>
+                <a:cs typeface="Microsoft YaHei"/>
               </a:rPr>
               <a:t>3.2</a:t>
             </a:r>
@@ -3918,14 +4037,21 @@
               <a:lnSpc>
                 <a:spcPct val="112000"/>
               </a:lnSpc>
+              <a:spcBef>
+                <a:spcPts val="0"/>
+              </a:spcBef>
+              <a:spcAft>
+                <a:spcPts val="0"/>
+              </a:spcAft>
             </a:pPr>
             <a:r>
-              <a:rPr sz="950" b="0" i="0">
+              <a:rPr sz="950" b="0" i="0" lang="zh-CN" altLang="zh-CN">
                 <a:solidFill>
                   <a:srgbClr val="595959"/>
                 </a:solidFill>
                 <a:latin typeface="Microsoft YaHei"/>
                 <a:ea typeface="Microsoft YaHei"/>
+                <a:cs typeface="Microsoft YaHei"/>
               </a:rPr>
               <a:t>2023</a:t>
             </a:r>
@@ -3972,7 +4098,14 @@
           <a:bodyPr rtlCol="0" anchor="ctr"/>
           <a:lstStyle/>
           <a:p>
-            <a:pPr algn="ctr"/>
+            <a:pPr algn="ctr">
+              <a:spcBef>
+                <a:spcPts val="0"/>
+              </a:spcBef>
+              <a:spcAft>
+                <a:spcPts val="0"/>
+              </a:spcAft>
+            </a:pPr>
           </a:p>
         </p:txBody>
       </p:sp>
@@ -3984,8 +4117,8 @@
         </p:nvSpPr>
         <p:spPr>
           <a:xfrm>
-            <a:off x="1520825" y="4558893"/>
-            <a:ext cx="783166" cy="139700"/>
+            <a:off x="1520825" y="4538509"/>
+            <a:ext cx="783166" cy="180467"/>
           </a:xfrm>
           <a:prstGeom prst="rect">
             <a:avLst/>
@@ -4002,14 +4135,21 @@
               <a:lnSpc>
                 <a:spcPct val="112000"/>
               </a:lnSpc>
+              <a:spcBef>
+                <a:spcPts val="0"/>
+              </a:spcBef>
+              <a:spcAft>
+                <a:spcPts val="0"/>
+              </a:spcAft>
             </a:pPr>
             <a:r>
-              <a:rPr sz="1000" b="1" i="0">
+              <a:rPr sz="1000" b="1" i="0" lang="zh-CN" altLang="zh-CN">
                 <a:solidFill>
                   <a:srgbClr val="262626"/>
                 </a:solidFill>
                 <a:latin typeface="Microsoft YaHei"/>
                 <a:ea typeface="Microsoft YaHei"/>
+                <a:cs typeface="Microsoft YaHei"/>
               </a:rPr>
               <a:t>4.1</a:t>
             </a:r>
@@ -4042,14 +4182,21 @@
               <a:lnSpc>
                 <a:spcPct val="112000"/>
               </a:lnSpc>
+              <a:spcBef>
+                <a:spcPts val="0"/>
+              </a:spcBef>
+              <a:spcAft>
+                <a:spcPts val="0"/>
+              </a:spcAft>
             </a:pPr>
             <a:r>
-              <a:rPr sz="950" b="0" i="0">
+              <a:rPr sz="950" b="0" i="0" lang="zh-CN" altLang="zh-CN">
                 <a:solidFill>
                   <a:srgbClr val="595959"/>
                 </a:solidFill>
                 <a:latin typeface="Microsoft YaHei"/>
                 <a:ea typeface="Microsoft YaHei"/>
+                <a:cs typeface="Microsoft YaHei"/>
               </a:rPr>
               <a:t>2024</a:t>
             </a:r>
@@ -4096,7 +4243,14 @@
           <a:bodyPr rtlCol="0" anchor="ctr"/>
           <a:lstStyle/>
           <a:p>
-            <a:pPr algn="ctr"/>
+            <a:pPr algn="ctr">
+              <a:spcBef>
+                <a:spcPts val="0"/>
+              </a:spcBef>
+              <a:spcAft>
+                <a:spcPts val="0"/>
+              </a:spcAft>
+            </a:pPr>
           </a:p>
         </p:txBody>
       </p:sp>
@@ -4108,8 +4262,8 @@
         </p:nvSpPr>
         <p:spPr>
           <a:xfrm>
-            <a:off x="2303991" y="4335780"/>
-            <a:ext cx="783166" cy="139700"/>
+            <a:off x="2303991" y="4315396"/>
+            <a:ext cx="783166" cy="180467"/>
           </a:xfrm>
           <a:prstGeom prst="rect">
             <a:avLst/>
@@ -4126,14 +4280,21 @@
               <a:lnSpc>
                 <a:spcPct val="112000"/>
               </a:lnSpc>
+              <a:spcBef>
+                <a:spcPts val="0"/>
+              </a:spcBef>
+              <a:spcAft>
+                <a:spcPts val="0"/>
+              </a:spcAft>
             </a:pPr>
             <a:r>
-              <a:rPr sz="1000" b="1" i="0">
+              <a:rPr sz="1000" b="1" i="0" lang="zh-CN" altLang="zh-CN">
                 <a:solidFill>
                   <a:srgbClr val="262626"/>
                 </a:solidFill>
                 <a:latin typeface="Microsoft YaHei"/>
                 <a:ea typeface="Microsoft YaHei"/>
+                <a:cs typeface="Microsoft YaHei"/>
               </a:rPr>
               <a:t>5.0</a:t>
             </a:r>
@@ -4166,14 +4327,21 @@
               <a:lnSpc>
                 <a:spcPct val="112000"/>
               </a:lnSpc>
+              <a:spcBef>
+                <a:spcPts val="0"/>
+              </a:spcBef>
+              <a:spcAft>
+                <a:spcPts val="0"/>
+              </a:spcAft>
             </a:pPr>
             <a:r>
-              <a:rPr sz="950" b="0" i="0">
+              <a:rPr sz="950" b="0" i="0" lang="zh-CN" altLang="zh-CN">
                 <a:solidFill>
                   <a:srgbClr val="595959"/>
                 </a:solidFill>
                 <a:latin typeface="Microsoft YaHei"/>
                 <a:ea typeface="Microsoft YaHei"/>
+                <a:cs typeface="Microsoft YaHei"/>
               </a:rPr>
               <a:t>2025</a:t>
             </a:r>
@@ -4222,7 +4390,14 @@
           <a:bodyPr rtlCol="0" anchor="ctr"/>
           <a:lstStyle/>
           <a:p>
-            <a:pPr algn="ctr"/>
+            <a:pPr algn="ctr">
+              <a:spcBef>
+                <a:spcPts val="0"/>
+              </a:spcBef>
+              <a:spcAft>
+                <a:spcPts val="0"/>
+              </a:spcAft>
+            </a:pPr>
           </a:p>
         </p:txBody>
       </p:sp>
@@ -4266,7 +4441,14 @@
           <a:bodyPr rtlCol="0" anchor="ctr"/>
           <a:lstStyle/>
           <a:p>
-            <a:pPr algn="ctr"/>
+            <a:pPr algn="ctr">
+              <a:spcBef>
+                <a:spcPts val="0"/>
+              </a:spcBef>
+              <a:spcAft>
+                <a:spcPts val="0"/>
+              </a:spcAft>
+            </a:pPr>
           </a:p>
         </p:txBody>
       </p:sp>
@@ -4310,7 +4492,14 @@
           <a:bodyPr rtlCol="0" anchor="ctr"/>
           <a:lstStyle/>
           <a:p>
-            <a:pPr algn="ctr"/>
+            <a:pPr algn="ctr">
+              <a:spcBef>
+                <a:spcPts val="0"/>
+              </a:spcBef>
+              <a:spcAft>
+                <a:spcPts val="0"/>
+              </a:spcAft>
+            </a:pPr>
           </a:p>
         </p:txBody>
       </p:sp>
@@ -4340,14 +4529,21 @@
               <a:lnSpc>
                 <a:spcPct val="112000"/>
               </a:lnSpc>
+              <a:spcBef>
+                <a:spcPts val="0"/>
+              </a:spcBef>
+              <a:spcAft>
+                <a:spcPts val="0"/>
+              </a:spcAft>
             </a:pPr>
             <a:r>
-              <a:rPr sz="1500" b="1" i="0">
+              <a:rPr sz="1500" b="1" i="0" lang="zh-CN" altLang="zh-CN">
                 <a:solidFill>
                   <a:srgbClr val="262626"/>
                 </a:solidFill>
                 <a:latin typeface="Microsoft YaHei"/>
                 <a:ea typeface="Microsoft YaHei"/>
+                <a:cs typeface="Microsoft YaHei"/>
               </a:rPr>
               <a:t>方案</a:t>
             </a:r>
@@ -4394,7 +4590,14 @@
           <a:bodyPr rtlCol="0" anchor="ctr"/>
           <a:lstStyle/>
           <a:p>
-            <a:pPr algn="ctr"/>
+            <a:pPr algn="ctr">
+              <a:spcBef>
+                <a:spcPts val="0"/>
+              </a:spcBef>
+              <a:spcAft>
+                <a:spcPts val="0"/>
+              </a:spcAft>
+            </a:pPr>
           </a:p>
         </p:txBody>
       </p:sp>
@@ -4424,14 +4627,21 @@
               <a:lnSpc>
                 <a:spcPct val="112000"/>
               </a:lnSpc>
+              <a:spcBef>
+                <a:spcPts val="0"/>
+              </a:spcBef>
+              <a:spcAft>
+                <a:spcPts val="0"/>
+              </a:spcAft>
             </a:pPr>
             <a:r>
-              <a:rPr sz="1450" b="1" i="0">
+              <a:rPr sz="1450" b="1" i="0" lang="zh-CN" altLang="zh-CN">
                 <a:solidFill>
                   <a:srgbClr val="1F4E79"/>
                 </a:solidFill>
                 <a:latin typeface="Microsoft YaHei"/>
                 <a:ea typeface="Microsoft YaHei"/>
+                <a:cs typeface="Microsoft YaHei"/>
               </a:rPr>
               <a:t>构建统一数据底座: 一套标准 · 一个目录 · 一条数据流水线</a:t>
             </a:r>
@@ -4464,14 +4674,21 @@
               <a:lnSpc>
                 <a:spcPct val="130000"/>
               </a:lnSpc>
+              <a:spcBef>
+                <a:spcPts val="0"/>
+              </a:spcBef>
+              <a:spcAft>
+                <a:spcPts val="0"/>
+              </a:spcAft>
             </a:pPr>
             <a:r>
-              <a:rPr sz="1200" b="0" i="0">
+              <a:rPr sz="1200" b="0" i="0" lang="zh-CN" altLang="zh-CN">
                 <a:solidFill>
                   <a:srgbClr val="262626"/>
                 </a:solidFill>
                 <a:latin typeface="Microsoft YaHei"/>
                 <a:ea typeface="Microsoft YaHei"/>
+                <a:cs typeface="Microsoft YaHei"/>
               </a:rPr>
               <a:t>方案坚持数据标准先行, 完成 1872 项指标的口径统一并建立三级评审发布机制; 采用湖仓一体架构实现数据实时入湖 T+0, 存储成本下降 45%; 依托智能元数据能力自动解析血缘关系, 资产目录覆盖率达到 96%。在此基础上全面推进数据服务化, 以 API 订阅方式开放数据能力, 取数周期从 5 天缩短至 2 小时; 建设统一权限中枢, 对敏感数据实施分级管控, 审计通过率达到 100%; 同步打通 DataOps 流水线, 需求到上线周期从 2 周压缩至 3 天, 数据开发复用率提升至 70%, 最终形成标准、平台、服务三位一体的数据治理闭环。</a:t>
             </a:r>
@@ -4520,7 +4737,14 @@
           <a:bodyPr rtlCol="0" anchor="ctr"/>
           <a:lstStyle/>
           <a:p>
-            <a:pPr algn="ctr"/>
+            <a:pPr algn="ctr">
+              <a:spcBef>
+                <a:spcPts val="0"/>
+              </a:spcBef>
+              <a:spcAft>
+                <a:spcPts val="0"/>
+              </a:spcAft>
+            </a:pPr>
           </a:p>
         </p:txBody>
       </p:sp>
@@ -4566,7 +4790,14 @@
           <a:bodyPr rtlCol="0" anchor="ctr"/>
           <a:lstStyle/>
           <a:p>
-            <a:pPr algn="ctr"/>
+            <a:pPr algn="ctr">
+              <a:spcBef>
+                <a:spcPts val="0"/>
+              </a:spcBef>
+              <a:spcAft>
+                <a:spcPts val="0"/>
+              </a:spcAft>
+            </a:pPr>
           </a:p>
         </p:txBody>
       </p:sp>
@@ -4612,7 +4843,14 @@
           <a:bodyPr rtlCol="0" anchor="ctr"/>
           <a:lstStyle/>
           <a:p>
-            <a:pPr algn="ctr"/>
+            <a:pPr algn="ctr">
+              <a:spcBef>
+                <a:spcPts val="0"/>
+              </a:spcBef>
+              <a:spcAft>
+                <a:spcPts val="0"/>
+              </a:spcAft>
+            </a:pPr>
           </a:p>
         </p:txBody>
       </p:sp>
@@ -4624,8 +4862,8 @@
         </p:nvSpPr>
         <p:spPr>
           <a:xfrm>
-            <a:off x="5905500" y="4241222"/>
-            <a:ext cx="381000" cy="381000"/>
+            <a:off x="5823712" y="4136256"/>
+            <a:ext cx="544576" cy="590931"/>
           </a:xfrm>
           <a:prstGeom prst="rect">
             <a:avLst/>
@@ -4642,14 +4880,21 @@
               <a:lnSpc>
                 <a:spcPct val="112000"/>
               </a:lnSpc>
+              <a:spcBef>
+                <a:spcPts val="0"/>
+              </a:spcBef>
+              <a:spcAft>
+                <a:spcPts val="0"/>
+              </a:spcAft>
             </a:pPr>
             <a:r>
-              <a:rPr sz="3600" b="1" i="0">
+              <a:rPr sz="3600" b="1" i="0" lang="zh-CN" altLang="zh-CN">
                 <a:solidFill>
                   <a:srgbClr val="1F4E79"/>
                 </a:solidFill>
                 <a:latin typeface="Microsoft YaHei"/>
                 <a:ea typeface="Microsoft YaHei"/>
+                <a:cs typeface="Microsoft YaHei"/>
               </a:rPr>
               <a:t>⚙</a:t>
             </a:r>
@@ -4698,7 +4943,14 @@
           <a:bodyPr rtlCol="0" anchor="ctr"/>
           <a:lstStyle/>
           <a:p>
-            <a:pPr algn="ctr"/>
+            <a:pPr algn="ctr">
+              <a:spcBef>
+                <a:spcPts val="0"/>
+              </a:spcBef>
+              <a:spcAft>
+                <a:spcPts val="0"/>
+              </a:spcAft>
+            </a:pPr>
           </a:p>
         </p:txBody>
       </p:sp>
@@ -4728,14 +4980,21 @@
               <a:lnSpc>
                 <a:spcPct val="112000"/>
               </a:lnSpc>
+              <a:spcBef>
+                <a:spcPts val="0"/>
+              </a:spcBef>
+              <a:spcAft>
+                <a:spcPts val="0"/>
+              </a:spcAft>
             </a:pPr>
             <a:r>
-              <a:rPr sz="2400" b="1" i="0">
+              <a:rPr sz="2400" b="1" i="0" lang="zh-CN" altLang="zh-CN">
                 <a:solidFill>
                   <a:srgbClr val="1F4E79"/>
                 </a:solidFill>
                 <a:latin typeface="Microsoft YaHei"/>
                 <a:ea typeface="Microsoft YaHei"/>
+                <a:cs typeface="Microsoft YaHei"/>
               </a:rPr>
               <a:t>✓</a:t>
             </a:r>
@@ -4824,8 +5083,8 @@
         </p:nvSpPr>
         <p:spPr>
           <a:xfrm>
-            <a:off x="4381500" y="4724400"/>
-            <a:ext cx="762000" cy="139700"/>
+            <a:off x="4381500" y="4707953"/>
+            <a:ext cx="762000" cy="172593"/>
           </a:xfrm>
           <a:prstGeom prst="rect">
             <a:avLst/>
@@ -4842,14 +5101,21 @@
               <a:lnSpc>
                 <a:spcPct val="112000"/>
               </a:lnSpc>
+              <a:spcBef>
+                <a:spcPts val="0"/>
+              </a:spcBef>
+              <a:spcAft>
+                <a:spcPts val="0"/>
+              </a:spcAft>
             </a:pPr>
             <a:r>
-              <a:rPr sz="950" b="0" i="0">
+              <a:rPr sz="950" b="0" i="0" lang="zh-CN" altLang="zh-CN">
                 <a:solidFill>
                   <a:srgbClr val="595959"/>
                 </a:solidFill>
                 <a:latin typeface="Microsoft YaHei"/>
                 <a:ea typeface="Microsoft YaHei"/>
+                <a:cs typeface="Microsoft YaHei"/>
               </a:rPr>
               <a:t>多源接入</a:t>
             </a:r>
@@ -4864,8 +5130,8 @@
         </p:nvSpPr>
         <p:spPr>
           <a:xfrm>
-            <a:off x="5715000" y="4724400"/>
-            <a:ext cx="762000" cy="139700"/>
+            <a:off x="5715000" y="4707953"/>
+            <a:ext cx="762000" cy="172593"/>
           </a:xfrm>
           <a:prstGeom prst="rect">
             <a:avLst/>
@@ -4882,14 +5148,21 @@
               <a:lnSpc>
                 <a:spcPct val="112000"/>
               </a:lnSpc>
+              <a:spcBef>
+                <a:spcPts val="0"/>
+              </a:spcBef>
+              <a:spcAft>
+                <a:spcPts val="0"/>
+              </a:spcAft>
             </a:pPr>
             <a:r>
-              <a:rPr sz="950" b="0" i="0">
+              <a:rPr sz="950" b="0" i="0" lang="zh-CN" altLang="zh-CN">
                 <a:solidFill>
                   <a:srgbClr val="595959"/>
                 </a:solidFill>
                 <a:latin typeface="Microsoft YaHei"/>
                 <a:ea typeface="Microsoft YaHei"/>
+                <a:cs typeface="Microsoft YaHei"/>
               </a:rPr>
               <a:t>统一加工</a:t>
             </a:r>
@@ -4904,8 +5177,8 @@
         </p:nvSpPr>
         <p:spPr>
           <a:xfrm>
-            <a:off x="7048500" y="4724400"/>
-            <a:ext cx="762000" cy="139700"/>
+            <a:off x="7048500" y="4707953"/>
+            <a:ext cx="762000" cy="172593"/>
           </a:xfrm>
           <a:prstGeom prst="rect">
             <a:avLst/>
@@ -4922,14 +5195,21 @@
               <a:lnSpc>
                 <a:spcPct val="112000"/>
               </a:lnSpc>
+              <a:spcBef>
+                <a:spcPts val="0"/>
+              </a:spcBef>
+              <a:spcAft>
+                <a:spcPts val="0"/>
+              </a:spcAft>
             </a:pPr>
             <a:r>
-              <a:rPr sz="950" b="0" i="0">
+              <a:rPr sz="950" b="0" i="0" lang="zh-CN" altLang="zh-CN">
                 <a:solidFill>
                   <a:srgbClr val="595959"/>
                 </a:solidFill>
                 <a:latin typeface="Microsoft YaHei"/>
                 <a:ea typeface="Microsoft YaHei"/>
+                <a:cs typeface="Microsoft YaHei"/>
               </a:rPr>
               <a:t>可信消费</a:t>
             </a:r>
@@ -4962,14 +5242,21 @@
               <a:lnSpc>
                 <a:spcPct val="112000"/>
               </a:lnSpc>
+              <a:spcBef>
+                <a:spcPts val="0"/>
+              </a:spcBef>
+              <a:spcAft>
+                <a:spcPts val="0"/>
+              </a:spcAft>
             </a:pPr>
             <a:r>
-              <a:rPr sz="1050" b="0" i="0">
+              <a:rPr sz="1050" b="0" i="0" lang="zh-CN" altLang="zh-CN">
                 <a:solidFill>
                   <a:srgbClr val="595959"/>
                 </a:solidFill>
                 <a:latin typeface="Microsoft YaHei"/>
                 <a:ea typeface="Microsoft YaHei"/>
+                <a:cs typeface="Microsoft YaHei"/>
               </a:rPr>
               <a:t>三大关键能力</a:t>
             </a:r>
@@ -5018,7 +5305,14 @@
           <a:bodyPr rtlCol="0" anchor="ctr"/>
           <a:lstStyle/>
           <a:p>
-            <a:pPr algn="ctr"/>
+            <a:pPr algn="ctr">
+              <a:spcBef>
+                <a:spcPts val="0"/>
+              </a:spcBef>
+              <a:spcAft>
+                <a:spcPts val="0"/>
+              </a:spcAft>
+            </a:pPr>
           </a:p>
         </p:txBody>
       </p:sp>
@@ -5048,14 +5342,21 @@
               <a:lnSpc>
                 <a:spcPct val="112000"/>
               </a:lnSpc>
+              <a:spcBef>
+                <a:spcPts val="0"/>
+              </a:spcBef>
+              <a:spcAft>
+                <a:spcPts val="0"/>
+              </a:spcAft>
             </a:pPr>
             <a:r>
-              <a:rPr sz="1200" b="1" i="0">
+              <a:rPr sz="1200" b="1" i="0" lang="zh-CN" altLang="zh-CN">
                 <a:solidFill>
                   <a:srgbClr val="1F4E79"/>
                 </a:solidFill>
                 <a:latin typeface="Microsoft YaHei"/>
                 <a:ea typeface="Microsoft YaHei"/>
+                <a:cs typeface="Microsoft YaHei"/>
               </a:rPr>
               <a:t>数据标准</a:t>
             </a:r>
@@ -5104,7 +5405,14 @@
           <a:bodyPr rtlCol="0" anchor="ctr"/>
           <a:lstStyle/>
           <a:p>
-            <a:pPr algn="ctr"/>
+            <a:pPr algn="ctr">
+              <a:spcBef>
+                <a:spcPts val="0"/>
+              </a:spcBef>
+              <a:spcAft>
+                <a:spcPts val="0"/>
+              </a:spcAft>
+            </a:pPr>
           </a:p>
         </p:txBody>
       </p:sp>
@@ -5134,14 +5442,21 @@
               <a:lnSpc>
                 <a:spcPct val="112000"/>
               </a:lnSpc>
+              <a:spcBef>
+                <a:spcPts val="0"/>
+              </a:spcBef>
+              <a:spcAft>
+                <a:spcPts val="0"/>
+              </a:spcAft>
             </a:pPr>
             <a:r>
-              <a:rPr sz="1200" b="1" i="0">
+              <a:rPr sz="1200" b="1" i="0" lang="zh-CN" altLang="zh-CN">
                 <a:solidFill>
                   <a:srgbClr val="1F4E79"/>
                 </a:solidFill>
                 <a:latin typeface="Microsoft YaHei"/>
                 <a:ea typeface="Microsoft YaHei"/>
+                <a:cs typeface="Microsoft YaHei"/>
               </a:rPr>
               <a:t>湖仓一体</a:t>
             </a:r>
@@ -5190,7 +5505,14 @@
           <a:bodyPr rtlCol="0" anchor="ctr"/>
           <a:lstStyle/>
           <a:p>
-            <a:pPr algn="ctr"/>
+            <a:pPr algn="ctr">
+              <a:spcBef>
+                <a:spcPts val="0"/>
+              </a:spcBef>
+              <a:spcAft>
+                <a:spcPts val="0"/>
+              </a:spcAft>
+            </a:pPr>
           </a:p>
         </p:txBody>
       </p:sp>
@@ -5220,14 +5542,21 @@
               <a:lnSpc>
                 <a:spcPct val="112000"/>
               </a:lnSpc>
+              <a:spcBef>
+                <a:spcPts val="0"/>
+              </a:spcBef>
+              <a:spcAft>
+                <a:spcPts val="0"/>
+              </a:spcAft>
             </a:pPr>
             <a:r>
-              <a:rPr sz="1200" b="1" i="0">
+              <a:rPr sz="1200" b="1" i="0" lang="zh-CN" altLang="zh-CN">
                 <a:solidFill>
                   <a:srgbClr val="1F4E79"/>
                 </a:solidFill>
                 <a:latin typeface="Microsoft YaHei"/>
                 <a:ea typeface="Microsoft YaHei"/>
+                <a:cs typeface="Microsoft YaHei"/>
               </a:rPr>
               <a:t>数据服务</a:t>
             </a:r>
@@ -5260,14 +5589,21 @@
               <a:lnSpc>
                 <a:spcPct val="112000"/>
               </a:lnSpc>
+              <a:spcBef>
+                <a:spcPts val="0"/>
+              </a:spcBef>
+              <a:spcAft>
+                <a:spcPts val="0"/>
+              </a:spcAft>
             </a:pPr>
             <a:r>
-              <a:rPr sz="1000" b="0" i="0">
+              <a:rPr sz="1000" b="0" i="0" lang="zh-CN" altLang="zh-CN">
                 <a:solidFill>
                   <a:srgbClr val="595959"/>
                 </a:solidFill>
                 <a:latin typeface="Microsoft YaHei"/>
                 <a:ea typeface="Microsoft YaHei"/>
+                <a:cs typeface="Microsoft YaHei"/>
               </a:rPr>
               <a:t>三大能力已在消费者/车 BU/云核心网 3 个业务线落地验证</a:t>
             </a:r>
@@ -5316,7 +5652,14 @@
           <a:bodyPr rtlCol="0" anchor="ctr"/>
           <a:lstStyle/>
           <a:p>
-            <a:pPr algn="ctr"/>
+            <a:pPr algn="ctr">
+              <a:spcBef>
+                <a:spcPts val="0"/>
+              </a:spcBef>
+              <a:spcAft>
+                <a:spcPts val="0"/>
+              </a:spcAft>
+            </a:pPr>
           </a:p>
         </p:txBody>
       </p:sp>
@@ -5360,7 +5703,14 @@
           <a:bodyPr rtlCol="0" anchor="ctr"/>
           <a:lstStyle/>
           <a:p>
-            <a:pPr algn="ctr"/>
+            <a:pPr algn="ctr">
+              <a:spcBef>
+                <a:spcPts val="0"/>
+              </a:spcBef>
+              <a:spcAft>
+                <a:spcPts val="0"/>
+              </a:spcAft>
+            </a:pPr>
           </a:p>
         </p:txBody>
       </p:sp>
@@ -5404,7 +5754,14 @@
           <a:bodyPr rtlCol="0" anchor="ctr"/>
           <a:lstStyle/>
           <a:p>
-            <a:pPr algn="ctr"/>
+            <a:pPr algn="ctr">
+              <a:spcBef>
+                <a:spcPts val="0"/>
+              </a:spcBef>
+              <a:spcAft>
+                <a:spcPts val="0"/>
+              </a:spcAft>
+            </a:pPr>
           </a:p>
         </p:txBody>
       </p:sp>
@@ -5434,14 +5791,21 @@
               <a:lnSpc>
                 <a:spcPct val="112000"/>
               </a:lnSpc>
+              <a:spcBef>
+                <a:spcPts val="0"/>
+              </a:spcBef>
+              <a:spcAft>
+                <a:spcPts val="0"/>
+              </a:spcAft>
             </a:pPr>
             <a:r>
-              <a:rPr sz="1500" b="1" i="0">
+              <a:rPr sz="1500" b="1" i="0" lang="zh-CN" altLang="zh-CN">
                 <a:solidFill>
                   <a:srgbClr val="262626"/>
                 </a:solidFill>
                 <a:latin typeface="Microsoft YaHei"/>
                 <a:ea typeface="Microsoft YaHei"/>
+                <a:cs typeface="Microsoft YaHei"/>
               </a:rPr>
               <a:t>收益</a:t>
             </a:r>
@@ -5488,7 +5852,14 @@
           <a:bodyPr rtlCol="0" anchor="ctr"/>
           <a:lstStyle/>
           <a:p>
-            <a:pPr algn="ctr"/>
+            <a:pPr algn="ctr">
+              <a:spcBef>
+                <a:spcPts val="0"/>
+              </a:spcBef>
+              <a:spcAft>
+                <a:spcPts val="0"/>
+              </a:spcAft>
+            </a:pPr>
           </a:p>
         </p:txBody>
       </p:sp>
@@ -5518,14 +5889,21 @@
               <a:lnSpc>
                 <a:spcPct val="112000"/>
               </a:lnSpc>
+              <a:spcBef>
+                <a:spcPts val="0"/>
+              </a:spcBef>
+              <a:spcAft>
+                <a:spcPts val="0"/>
+              </a:spcAft>
             </a:pPr>
             <a:r>
-              <a:rPr sz="1050" b="1" i="0">
+              <a:rPr sz="1050" b="1" i="0" lang="zh-CN" altLang="zh-CN">
                 <a:solidFill>
                   <a:srgbClr val="FFFFFF"/>
                 </a:solidFill>
                 <a:latin typeface="Microsoft YaHei"/>
                 <a:ea typeface="Microsoft YaHei"/>
+                <a:cs typeface="Microsoft YaHei"/>
               </a:rPr>
               <a:t>To-Be</a:t>
             </a:r>
@@ -5558,14 +5936,21 @@
               <a:lnSpc>
                 <a:spcPct val="130000"/>
               </a:lnSpc>
+              <a:spcBef>
+                <a:spcPts val="0"/>
+              </a:spcBef>
+              <a:spcAft>
+                <a:spcPts val="0"/>
+              </a:spcAft>
             </a:pPr>
             <a:r>
-              <a:rPr sz="1200" b="0" i="0">
+              <a:rPr sz="1200" b="0" i="0" lang="zh-CN" altLang="zh-CN">
                 <a:solidFill>
                   <a:srgbClr val="262626"/>
                 </a:solidFill>
                 <a:latin typeface="Microsoft YaHei"/>
                 <a:ea typeface="Microsoft YaHei"/>
+                <a:cs typeface="Microsoft YaHei"/>
               </a:rPr>
               <a:t>数据底座上线后, 跨域取数周期由 5 天缩短至 2 小时, 分析师自助取数率达到 85%, 报表人力每月节省 900 人时并转向高价值分析工作。数据质量评分从 62 提升至 93, 全公司决策口径实现统一; 沉睡数据盘活 38%, 数据资产进表估值 4.2 亿元; 合规层面审计抽检一次通过, 整改工单下降 72%。</a:t>
             </a:r>
@@ -5612,7 +5997,14 @@
           <a:bodyPr rtlCol="0" anchor="ctr"/>
           <a:lstStyle/>
           <a:p>
-            <a:pPr algn="ctr"/>
+            <a:pPr algn="ctr">
+              <a:spcBef>
+                <a:spcPts val="0"/>
+              </a:spcBef>
+              <a:spcAft>
+                <a:spcPts val="0"/>
+              </a:spcAft>
+            </a:pPr>
           </a:p>
         </p:txBody>
       </p:sp>
@@ -5642,14 +6034,21 @@
               <a:lnSpc>
                 <a:spcPct val="112000"/>
               </a:lnSpc>
+              <a:spcBef>
+                <a:spcPts val="0"/>
+              </a:spcBef>
+              <a:spcAft>
+                <a:spcPts val="0"/>
+              </a:spcAft>
             </a:pPr>
             <a:r>
-              <a:rPr sz="1400" b="1" i="0">
+              <a:rPr sz="1400" b="1" i="0" lang="zh-CN" altLang="zh-CN">
                 <a:solidFill>
                   <a:srgbClr val="262626"/>
                 </a:solidFill>
                 <a:latin typeface="Microsoft YaHei"/>
                 <a:ea typeface="Microsoft YaHei"/>
+                <a:cs typeface="Microsoft YaHei"/>
               </a:rPr>
               <a:t>取数效率 ×20</a:t>
             </a:r>
@@ -5696,7 +6095,14 @@
           <a:bodyPr rtlCol="0" anchor="ctr"/>
           <a:lstStyle/>
           <a:p>
-            <a:pPr algn="ctr"/>
+            <a:pPr algn="ctr">
+              <a:spcBef>
+                <a:spcPts val="0"/>
+              </a:spcBef>
+              <a:spcAft>
+                <a:spcPts val="0"/>
+              </a:spcAft>
+            </a:pPr>
           </a:p>
         </p:txBody>
       </p:sp>
@@ -5726,14 +6132,21 @@
               <a:lnSpc>
                 <a:spcPct val="112000"/>
               </a:lnSpc>
+              <a:spcBef>
+                <a:spcPts val="0"/>
+              </a:spcBef>
+              <a:spcAft>
+                <a:spcPts val="0"/>
+              </a:spcAft>
             </a:pPr>
             <a:r>
-              <a:rPr sz="1400" b="1" i="0">
+              <a:rPr sz="1400" b="1" i="0" lang="zh-CN" altLang="zh-CN">
                 <a:solidFill>
                   <a:srgbClr val="262626"/>
                 </a:solidFill>
                 <a:latin typeface="Microsoft YaHei"/>
                 <a:ea typeface="Microsoft YaHei"/>
+                <a:cs typeface="Microsoft YaHei"/>
               </a:rPr>
               <a:t>存储成本 -45%</a:t>
             </a:r>
@@ -5766,14 +6179,21 @@
               <a:lnSpc>
                 <a:spcPct val="112000"/>
               </a:lnSpc>
+              <a:spcBef>
+                <a:spcPts val="0"/>
+              </a:spcBef>
+              <a:spcAft>
+                <a:spcPts val="0"/>
+              </a:spcAft>
             </a:pPr>
             <a:r>
-              <a:rPr sz="1000" b="0" i="0">
+              <a:rPr sz="1000" b="0" i="0" lang="zh-CN" altLang="zh-CN">
                 <a:solidFill>
                   <a:srgbClr val="595959"/>
                 </a:solidFill>
                 <a:latin typeface="Microsoft YaHei"/>
                 <a:ea typeface="Microsoft YaHei"/>
+                <a:cs typeface="Microsoft YaHei"/>
               </a:rPr>
               <a:t>分析师自助取数率 (%)</a:t>
             </a:r>
@@ -6000,7 +6420,14 @@
           <a:bodyPr rtlCol="0" anchor="ctr"/>
           <a:lstStyle/>
           <a:p>
-            <a:pPr algn="ctr"/>
+            <a:pPr algn="ctr">
+              <a:spcBef>
+                <a:spcPts val="0"/>
+              </a:spcBef>
+              <a:spcAft>
+                <a:spcPts val="0"/>
+              </a:spcAft>
+            </a:pPr>
           </a:p>
         </p:txBody>
       </p:sp>
@@ -6012,8 +6439,8 @@
         </p:nvSpPr>
         <p:spPr>
           <a:xfrm>
-            <a:off x="9118600" y="5505766"/>
-            <a:ext cx="304800" cy="127000"/>
+            <a:off x="9118600" y="5482969"/>
+            <a:ext cx="304800" cy="172593"/>
           </a:xfrm>
           <a:prstGeom prst="rect">
             <a:avLst/>
@@ -6030,14 +6457,21 @@
               <a:lnSpc>
                 <a:spcPct val="112000"/>
               </a:lnSpc>
+              <a:spcBef>
+                <a:spcPts val="0"/>
+              </a:spcBef>
+              <a:spcAft>
+                <a:spcPts val="0"/>
+              </a:spcAft>
             </a:pPr>
             <a:r>
-              <a:rPr sz="950" b="0" i="0">
+              <a:rPr sz="950" b="0" i="0" lang="zh-CN" altLang="zh-CN">
                 <a:solidFill>
                   <a:srgbClr val="262626"/>
                 </a:solidFill>
                 <a:latin typeface="Microsoft YaHei"/>
                 <a:ea typeface="Microsoft YaHei"/>
+                <a:cs typeface="Microsoft YaHei"/>
               </a:rPr>
               <a:t>18</a:t>
             </a:r>
@@ -6052,8 +6486,8 @@
         </p:nvSpPr>
         <p:spPr>
           <a:xfrm>
-            <a:off x="9080500" y="5930900"/>
-            <a:ext cx="381000" cy="139700"/>
+            <a:off x="9080500" y="5914453"/>
+            <a:ext cx="381000" cy="172593"/>
           </a:xfrm>
           <a:prstGeom prst="rect">
             <a:avLst/>
@@ -6070,14 +6504,21 @@
               <a:lnSpc>
                 <a:spcPct val="112000"/>
               </a:lnSpc>
+              <a:spcBef>
+                <a:spcPts val="0"/>
+              </a:spcBef>
+              <a:spcAft>
+                <a:spcPts val="0"/>
+              </a:spcAft>
             </a:pPr>
             <a:r>
-              <a:rPr sz="950" b="0" i="0">
+              <a:rPr sz="950" b="0" i="0" lang="zh-CN" altLang="zh-CN">
                 <a:solidFill>
                   <a:srgbClr val="595959"/>
                 </a:solidFill>
                 <a:latin typeface="Microsoft YaHei"/>
                 <a:ea typeface="Microsoft YaHei"/>
+                <a:cs typeface="Microsoft YaHei"/>
               </a:rPr>
               <a:t>Q1</a:t>
             </a:r>
@@ -6124,7 +6565,14 @@
           <a:bodyPr rtlCol="0" anchor="ctr"/>
           <a:lstStyle/>
           <a:p>
-            <a:pPr algn="ctr"/>
+            <a:pPr algn="ctr">
+              <a:spcBef>
+                <a:spcPts val="0"/>
+              </a:spcBef>
+              <a:spcAft>
+                <a:spcPts val="0"/>
+              </a:spcAft>
+            </a:pPr>
           </a:p>
         </p:txBody>
       </p:sp>
@@ -6136,8 +6584,8 @@
         </p:nvSpPr>
         <p:spPr>
           <a:xfrm>
-            <a:off x="9834033" y="5243720"/>
-            <a:ext cx="304800" cy="127000"/>
+            <a:off x="9834033" y="5220923"/>
+            <a:ext cx="304800" cy="172593"/>
           </a:xfrm>
           <a:prstGeom prst="rect">
             <a:avLst/>
@@ -6154,14 +6602,21 @@
               <a:lnSpc>
                 <a:spcPct val="112000"/>
               </a:lnSpc>
+              <a:spcBef>
+                <a:spcPts val="0"/>
+              </a:spcBef>
+              <a:spcAft>
+                <a:spcPts val="0"/>
+              </a:spcAft>
             </a:pPr>
             <a:r>
-              <a:rPr sz="950" b="0" i="0">
+              <a:rPr sz="950" b="0" i="0" lang="zh-CN" altLang="zh-CN">
                 <a:solidFill>
                   <a:srgbClr val="262626"/>
                 </a:solidFill>
                 <a:latin typeface="Microsoft YaHei"/>
                 <a:ea typeface="Microsoft YaHei"/>
+                <a:cs typeface="Microsoft YaHei"/>
               </a:rPr>
               <a:t>42</a:t>
             </a:r>
@@ -6176,8 +6631,8 @@
         </p:nvSpPr>
         <p:spPr>
           <a:xfrm>
-            <a:off x="9795933" y="5930900"/>
-            <a:ext cx="381000" cy="139700"/>
+            <a:off x="9795933" y="5914453"/>
+            <a:ext cx="381000" cy="172593"/>
           </a:xfrm>
           <a:prstGeom prst="rect">
             <a:avLst/>
@@ -6194,14 +6649,21 @@
               <a:lnSpc>
                 <a:spcPct val="112000"/>
               </a:lnSpc>
+              <a:spcBef>
+                <a:spcPts val="0"/>
+              </a:spcBef>
+              <a:spcAft>
+                <a:spcPts val="0"/>
+              </a:spcAft>
             </a:pPr>
             <a:r>
-              <a:rPr sz="950" b="0" i="0">
+              <a:rPr sz="950" b="0" i="0" lang="zh-CN" altLang="zh-CN">
                 <a:solidFill>
                   <a:srgbClr val="595959"/>
                 </a:solidFill>
                 <a:latin typeface="Microsoft YaHei"/>
                 <a:ea typeface="Microsoft YaHei"/>
+                <a:cs typeface="Microsoft YaHei"/>
               </a:rPr>
               <a:t>Q2</a:t>
             </a:r>
@@ -6248,7 +6710,14 @@
           <a:bodyPr rtlCol="0" anchor="ctr"/>
           <a:lstStyle/>
           <a:p>
-            <a:pPr algn="ctr"/>
+            <a:pPr algn="ctr">
+              <a:spcBef>
+                <a:spcPts val="0"/>
+              </a:spcBef>
+              <a:spcAft>
+                <a:spcPts val="0"/>
+              </a:spcAft>
+            </a:pPr>
           </a:p>
         </p:txBody>
       </p:sp>
@@ -6260,8 +6729,8 @@
         </p:nvSpPr>
         <p:spPr>
           <a:xfrm>
-            <a:off x="10549466" y="4981675"/>
-            <a:ext cx="304800" cy="127000"/>
+            <a:off x="10549466" y="4958878"/>
+            <a:ext cx="304800" cy="172593"/>
           </a:xfrm>
           <a:prstGeom prst="rect">
             <a:avLst/>
@@ -6278,14 +6747,21 @@
               <a:lnSpc>
                 <a:spcPct val="112000"/>
               </a:lnSpc>
+              <a:spcBef>
+                <a:spcPts val="0"/>
+              </a:spcBef>
+              <a:spcAft>
+                <a:spcPts val="0"/>
+              </a:spcAft>
             </a:pPr>
             <a:r>
-              <a:rPr sz="950" b="0" i="0">
+              <a:rPr sz="950" b="0" i="0" lang="zh-CN" altLang="zh-CN">
                 <a:solidFill>
                   <a:srgbClr val="262626"/>
                 </a:solidFill>
                 <a:latin typeface="Microsoft YaHei"/>
                 <a:ea typeface="Microsoft YaHei"/>
+                <a:cs typeface="Microsoft YaHei"/>
               </a:rPr>
               <a:t>66</a:t>
             </a:r>
@@ -6300,8 +6776,8 @@
         </p:nvSpPr>
         <p:spPr>
           <a:xfrm>
-            <a:off x="10511366" y="5930900"/>
-            <a:ext cx="381000" cy="139700"/>
+            <a:off x="10511366" y="5914453"/>
+            <a:ext cx="381000" cy="172593"/>
           </a:xfrm>
           <a:prstGeom prst="rect">
             <a:avLst/>
@@ -6318,14 +6794,21 @@
               <a:lnSpc>
                 <a:spcPct val="112000"/>
               </a:lnSpc>
+              <a:spcBef>
+                <a:spcPts val="0"/>
+              </a:spcBef>
+              <a:spcAft>
+                <a:spcPts val="0"/>
+              </a:spcAft>
             </a:pPr>
             <a:r>
-              <a:rPr sz="950" b="0" i="0">
+              <a:rPr sz="950" b="0" i="0" lang="zh-CN" altLang="zh-CN">
                 <a:solidFill>
                   <a:srgbClr val="595959"/>
                 </a:solidFill>
                 <a:latin typeface="Microsoft YaHei"/>
                 <a:ea typeface="Microsoft YaHei"/>
+                <a:cs typeface="Microsoft YaHei"/>
               </a:rPr>
               <a:t>Q3</a:t>
             </a:r>
@@ -6372,7 +6855,14 @@
           <a:bodyPr rtlCol="0" anchor="ctr"/>
           <a:lstStyle/>
           <a:p>
-            <a:pPr algn="ctr"/>
+            <a:pPr algn="ctr">
+              <a:spcBef>
+                <a:spcPts val="0"/>
+              </a:spcBef>
+              <a:spcAft>
+                <a:spcPts val="0"/>
+              </a:spcAft>
+            </a:pPr>
           </a:p>
         </p:txBody>
       </p:sp>
@@ -6384,8 +6874,8 @@
         </p:nvSpPr>
         <p:spPr>
           <a:xfrm>
-            <a:off x="11264900" y="4774223"/>
-            <a:ext cx="304800" cy="127000"/>
+            <a:off x="11264900" y="4751426"/>
+            <a:ext cx="304800" cy="172593"/>
           </a:xfrm>
           <a:prstGeom prst="rect">
             <a:avLst/>
@@ -6402,14 +6892,21 @@
               <a:lnSpc>
                 <a:spcPct val="112000"/>
               </a:lnSpc>
+              <a:spcBef>
+                <a:spcPts val="0"/>
+              </a:spcBef>
+              <a:spcAft>
+                <a:spcPts val="0"/>
+              </a:spcAft>
             </a:pPr>
             <a:r>
-              <a:rPr sz="950" b="0" i="0">
+              <a:rPr sz="950" b="0" i="0" lang="zh-CN" altLang="zh-CN">
                 <a:solidFill>
                   <a:srgbClr val="262626"/>
                 </a:solidFill>
                 <a:latin typeface="Microsoft YaHei"/>
                 <a:ea typeface="Microsoft YaHei"/>
+                <a:cs typeface="Microsoft YaHei"/>
               </a:rPr>
               <a:t>85</a:t>
             </a:r>
@@ -6424,8 +6921,8 @@
         </p:nvSpPr>
         <p:spPr>
           <a:xfrm>
-            <a:off x="11226800" y="5930900"/>
-            <a:ext cx="381000" cy="139700"/>
+            <a:off x="11226800" y="5914453"/>
+            <a:ext cx="381000" cy="172593"/>
           </a:xfrm>
           <a:prstGeom prst="rect">
             <a:avLst/>
@@ -6442,14 +6939,21 @@
               <a:lnSpc>
                 <a:spcPct val="112000"/>
               </a:lnSpc>
+              <a:spcBef>
+                <a:spcPts val="0"/>
+              </a:spcBef>
+              <a:spcAft>
+                <a:spcPts val="0"/>
+              </a:spcAft>
             </a:pPr>
             <a:r>
-              <a:rPr sz="950" b="0" i="0">
+              <a:rPr sz="950" b="0" i="0" lang="zh-CN" altLang="zh-CN">
                 <a:solidFill>
                   <a:srgbClr val="595959"/>
                 </a:solidFill>
                 <a:latin typeface="Microsoft YaHei"/>
                 <a:ea typeface="Microsoft YaHei"/>
+                <a:cs typeface="Microsoft YaHei"/>
               </a:rPr>
               <a:t>Q4</a:t>
             </a:r>
